--- a/apps/report-os/GOLFWING_月次報告_2026-06_サンプル.pptx
+++ b/apps/report-os/GOLFWING_月次報告_2026-06_サンプル.pptx
@@ -543,40 +543,40 @@
                 <c:formatCode>General</c:formatCode>
                 <c:ptCount val="12"/>
                 <c:pt idx="0">
-                  <c:v>690000</c:v>
+                  <c:v>732278</c:v>
                 </c:pt>
                 <c:pt idx="1">
-                  <c:v>705000</c:v>
+                  <c:v>982393</c:v>
                 </c:pt>
                 <c:pt idx="2">
-                  <c:v>668000</c:v>
+                  <c:v>372605</c:v>
                 </c:pt>
                 <c:pt idx="3">
-                  <c:v>712000</c:v>
+                  <c:v>570376</c:v>
                 </c:pt>
                 <c:pt idx="4">
-                  <c:v>758000</c:v>
+                  <c:v>1225161</c:v>
                 </c:pt>
                 <c:pt idx="5">
-                  <c:v>921000</c:v>
+                  <c:v>929264</c:v>
                 </c:pt>
                 <c:pt idx="6">
-                  <c:v>640000</c:v>
+                  <c:v>831118</c:v>
                 </c:pt>
                 <c:pt idx="7">
-                  <c:v>688000</c:v>
+                  <c:v>678363</c:v>
                 </c:pt>
                 <c:pt idx="8">
-                  <c:v>795000</c:v>
+                  <c:v>890417</c:v>
                 </c:pt>
                 <c:pt idx="9">
-                  <c:v>731000</c:v>
+                  <c:v>999499</c:v>
                 </c:pt>
                 <c:pt idx="10">
-                  <c:v>715000</c:v>
+                  <c:v>782311</c:v>
                 </c:pt>
                 <c:pt idx="11">
-                  <c:v>842000</c:v>
+                  <c:v>1174200</c:v>
                 </c:pt>
               </c:numCache>
             </c:numRef>
@@ -2365,7 +2365,7 @@
                 <a:ea typeface="Meiryo" pitchFamily="34" charset="-122"/>
                 <a:cs typeface="Meiryo" pitchFamily="34" charset="-120"/>
               </a:rPr>
-              <a:t>尼崎インドアゴルフ　</a:t>
+              <a:t>宝塚　</a:t>
             </a:r>
             <a:pPr indent="0" marL="0">
               <a:buNone/>
@@ -2848,7 +2848,7 @@
                 <a:ea typeface="Meiryo" pitchFamily="34" charset="-122"/>
                 <a:cs typeface="Meiryo" pitchFamily="34" charset="-120"/>
               </a:rPr>
-              <a:t>体験予約数</a:t>
+              <a:t>体験（一時利用）</a:t>
             </a:r>
             <a:endParaRPr lang="en-US" sz="1200" dirty="0"/>
           </a:p>
@@ -2887,7 +2887,7 @@
                 <a:ea typeface="Meiryo" pitchFamily="34" charset="-122"/>
                 <a:cs typeface="Meiryo" pitchFamily="34" charset="-120"/>
               </a:rPr>
-              <a:t>37件</a:t>
+              <a:t>7件</a:t>
             </a:r>
             <a:endParaRPr lang="en-US" sz="3400" dirty="0"/>
           </a:p>
@@ -2934,13 +2934,13 @@
             <a:r>
               <a:rPr lang="en-US" sz="1100" b="1" dirty="0">
                 <a:solidFill>
-                  <a:srgbClr val="1E6B3A"/>
+                  <a:srgbClr val="C0392B"/>
                 </a:solidFill>
                 <a:latin typeface="Meiryo" pitchFamily="34" charset="0"/>
                 <a:ea typeface="Meiryo" pitchFamily="34" charset="-122"/>
                 <a:cs typeface="Meiryo" pitchFamily="34" charset="-120"/>
               </a:rPr>
-              <a:t>+6件 (+19.4%)</a:t>
+              <a:t>-10件 (-58.8%)</a:t>
             </a:r>
             <a:endParaRPr lang="en-US" sz="1100" dirty="0"/>
           </a:p>
@@ -2987,13 +2987,13 @@
             <a:r>
               <a:rPr lang="en-US" sz="1100" b="1" dirty="0">
                 <a:solidFill>
-                  <a:srgbClr val="1E6B3A"/>
+                  <a:srgbClr val="6B7B70"/>
                 </a:solidFill>
                 <a:latin typeface="Meiryo" pitchFamily="34" charset="0"/>
                 <a:ea typeface="Meiryo" pitchFamily="34" charset="-122"/>
                 <a:cs typeface="Meiryo" pitchFamily="34" charset="-120"/>
               </a:rPr>
-              <a:t>+13件 (+54.2%)</a:t>
+              <a:t>±0件 (0%)</a:t>
             </a:r>
             <a:endParaRPr lang="en-US" sz="1100" dirty="0"/>
           </a:p>
@@ -3061,7 +3061,7 @@
                 <a:ea typeface="Meiryo" pitchFamily="34" charset="-122"/>
                 <a:cs typeface="Meiryo" pitchFamily="34" charset="-120"/>
               </a:rPr>
-              <a:t>入会率</a:t>
+              <a:t>入会率(入会/体験)</a:t>
             </a:r>
             <a:endParaRPr lang="en-US" sz="1200" dirty="0"/>
           </a:p>
@@ -3100,7 +3100,7 @@
                 <a:ea typeface="Meiryo" pitchFamily="34" charset="-122"/>
                 <a:cs typeface="Meiryo" pitchFamily="34" charset="-120"/>
               </a:rPr>
-              <a:t>62.5%</a:t>
+              <a:t>128.6%</a:t>
             </a:r>
             <a:endParaRPr lang="en-US" sz="3400" dirty="0"/>
           </a:p>
@@ -3153,7 +3153,7 @@
                 <a:ea typeface="Meiryo" pitchFamily="34" charset="-122"/>
                 <a:cs typeface="Meiryo" pitchFamily="34" charset="-120"/>
               </a:rPr>
-              <a:t>+7.5pt (+13.6%)</a:t>
+              <a:t>+75.7pt (+143.1%)</a:t>
             </a:r>
             <a:endParaRPr lang="en-US" sz="1100" dirty="0"/>
           </a:p>
@@ -3206,7 +3206,7 @@
                 <a:ea typeface="Meiryo" pitchFamily="34" charset="-122"/>
                 <a:cs typeface="Meiryo" pitchFamily="34" charset="-120"/>
               </a:rPr>
-              <a:t>+14.5pt (+30.2%)</a:t>
+              <a:t>+57.2pt (+80.1%)</a:t>
             </a:r>
             <a:endParaRPr lang="en-US" sz="1100" dirty="0"/>
           </a:p>
@@ -3526,7 +3526,7 @@
                 <a:ea typeface="Meiryo" pitchFamily="34" charset="-122"/>
                 <a:cs typeface="Meiryo" pitchFamily="34" charset="-120"/>
               </a:rPr>
-              <a:t>¥842,000</a:t>
+              <a:t>¥1,174,200</a:t>
             </a:r>
             <a:endParaRPr lang="en-US" sz="2600" dirty="0"/>
           </a:p>
@@ -3579,7 +3579,7 @@
                 <a:ea typeface="Meiryo" pitchFamily="34" charset="-122"/>
                 <a:cs typeface="Meiryo" pitchFamily="34" charset="-120"/>
               </a:rPr>
-              <a:t>+127,000円 (+17.8%)</a:t>
+              <a:t>+391,889円 (+50.1%)</a:t>
             </a:r>
             <a:endParaRPr lang="en-US" sz="1100" dirty="0"/>
           </a:p>
@@ -3626,13 +3626,13 @@
             <a:r>
               <a:rPr lang="en-US" sz="1100" b="1" dirty="0">
                 <a:solidFill>
-                  <a:srgbClr val="1E6B3A"/>
+                  <a:srgbClr val="C0392B"/>
                 </a:solidFill>
                 <a:latin typeface="Meiryo" pitchFamily="34" charset="0"/>
                 <a:ea typeface="Meiryo" pitchFamily="34" charset="-122"/>
                 <a:cs typeface="Meiryo" pitchFamily="34" charset="-120"/>
               </a:rPr>
-              <a:t>+152,000円 (+22%)</a:t>
+              <a:t>-218,401円 (-15.7%)</a:t>
             </a:r>
             <a:endParaRPr lang="en-US" sz="1100" dirty="0"/>
           </a:p>
@@ -3739,7 +3739,7 @@
                 <a:ea typeface="Meiryo" pitchFamily="34" charset="-122"/>
                 <a:cs typeface="Meiryo" pitchFamily="34" charset="-120"/>
               </a:rPr>
-              <a:t>14件</a:t>
+              <a:t>7件</a:t>
             </a:r>
             <a:endParaRPr lang="en-US" sz="3400" dirty="0"/>
           </a:p>
@@ -3786,13 +3786,13 @@
             <a:r>
               <a:rPr lang="en-US" sz="1100" b="1" dirty="0">
                 <a:solidFill>
-                  <a:srgbClr val="1E6B3A"/>
+                  <a:srgbClr val="C0392B"/>
                 </a:solidFill>
                 <a:latin typeface="Meiryo" pitchFamily="34" charset="0"/>
                 <a:ea typeface="Meiryo" pitchFamily="34" charset="-122"/>
                 <a:cs typeface="Meiryo" pitchFamily="34" charset="-120"/>
               </a:rPr>
-              <a:t>+3件 (+27.3%)</a:t>
+              <a:t>-6件 (-46.2%)</a:t>
             </a:r>
             <a:endParaRPr lang="en-US" sz="1100" dirty="0"/>
           </a:p>
@@ -3839,13 +3839,13 @@
             <a:r>
               <a:rPr lang="en-US" sz="1100" b="1" dirty="0">
                 <a:solidFill>
-                  <a:srgbClr val="1E6B3A"/>
+                  <a:srgbClr val="C0392B"/>
                 </a:solidFill>
                 <a:latin typeface="Meiryo" pitchFamily="34" charset="0"/>
                 <a:ea typeface="Meiryo" pitchFamily="34" charset="-122"/>
                 <a:cs typeface="Meiryo" pitchFamily="34" charset="-120"/>
               </a:rPr>
-              <a:t>+5件 (+55.6%)</a:t>
+              <a:t>-1件 (-12.5%)</a:t>
             </a:r>
             <a:endParaRPr lang="en-US" sz="1100" dirty="0"/>
           </a:p>
@@ -4831,8 +4831,8 @@
         </p:nvSpPr>
         <p:spPr>
           <a:xfrm>
-            <a:off x="6720840" y="1600200"/>
-            <a:ext cx="1783080" cy="457200"/>
+            <a:off x="6720840" y="1627632"/>
+            <a:ext cx="1783080" cy="411480"/>
           </a:xfrm>
           <a:prstGeom prst="rect">
             <a:avLst/>
@@ -4848,7 +4848,7 @@
               <a:buNone/>
             </a:pPr>
             <a:r>
-              <a:rPr lang="en-US" sz="2400" b="1" dirty="0">
+              <a:rPr lang="en-US" sz="1900" b="1" dirty="0">
                 <a:solidFill>
                   <a:srgbClr val="1E6B3A"/>
                 </a:solidFill>
@@ -4856,9 +4856,9 @@
                 <a:ea typeface="Meiryo" pitchFamily="34" charset="-122"/>
                 <a:cs typeface="Meiryo" pitchFamily="34" charset="-120"/>
               </a:rPr>
-              <a:t>¥842,000</a:t>
-            </a:r>
-            <a:endParaRPr lang="en-US" sz="2400" dirty="0"/>
+              <a:t>¥1,174,200</a:t>
+            </a:r>
+            <a:endParaRPr lang="en-US" sz="1900" dirty="0"/>
           </a:p>
         </p:txBody>
       </p:sp>
@@ -4909,7 +4909,7 @@
                 <a:ea typeface="Meiryo" pitchFamily="34" charset="-122"/>
                 <a:cs typeface="Meiryo" pitchFamily="34" charset="-120"/>
               </a:rPr>
-              <a:t>+127,000円 (+17.8%)</a:t>
+              <a:t>+391,889円 (+50.1%)</a:t>
             </a:r>
             <a:endParaRPr lang="en-US" sz="1100" dirty="0"/>
           </a:p>
@@ -5009,7 +5009,7 @@
                 <a:ea typeface="Meiryo" pitchFamily="34" charset="-122"/>
                 <a:cs typeface="Meiryo" pitchFamily="34" charset="-120"/>
               </a:rPr>
-              <a:t>14件</a:t>
+              <a:t>7件</a:t>
             </a:r>
             <a:endParaRPr lang="en-US" sz="3400" dirty="0"/>
           </a:p>
@@ -5023,8 +5023,8 @@
         </p:nvSpPr>
         <p:spPr>
           <a:xfrm>
-            <a:off x="6720840" y="3520440"/>
-            <a:ext cx="1783080" cy="502920"/>
+            <a:off x="6720840" y="3493008"/>
+            <a:ext cx="1783080" cy="256032"/>
           </a:xfrm>
           <a:prstGeom prst="rect">
             <a:avLst/>
@@ -5037,9 +5037,6 @@
           <a:lstStyle/>
           <a:p>
             <a:pPr indent="0" marL="0">
-              <a:lnSpc>
-                <a:spcPct val="110000"/>
-              </a:lnSpc>
               <a:buNone/>
             </a:pPr>
             <a:r>
@@ -5054,9 +5051,6 @@
               <a:t>前月比 </a:t>
             </a:r>
             <a:pPr indent="0" marL="0">
-              <a:lnSpc>
-                <a:spcPct val="110000"/>
-              </a:lnSpc>
               <a:buNone/>
             </a:pPr>
             <a:r>
@@ -5068,12 +5062,34 @@
                 <a:ea typeface="Meiryo" pitchFamily="34" charset="-122"/>
                 <a:cs typeface="Meiryo" pitchFamily="34" charset="-120"/>
               </a:rPr>
-              <a:t>+3件 (+27.3%)</a:t>
-            </a:r>
+              <a:t>-6件 (-46.2%)</a:t>
+            </a:r>
+            <a:endParaRPr lang="en-US" sz="1100" dirty="0"/>
+          </a:p>
+        </p:txBody>
+      </p:sp>
+      <p:sp>
+        <p:nvSpPr>
+          <p:cNvPr id="14" name="Text 11"/>
+          <p:cNvSpPr/>
+          <p:nvPr/>
+        </p:nvSpPr>
+        <p:spPr>
+          <a:xfrm>
+            <a:off x="6720840" y="3749040"/>
+            <a:ext cx="1783080" cy="256032"/>
+          </a:xfrm>
+          <a:prstGeom prst="rect">
+            <a:avLst/>
+          </a:prstGeom>
+          <a:noFill/>
+          <a:ln/>
+        </p:spPr>
+        <p:txBody>
+          <a:bodyPr wrap="square" lIns="0" tIns="0" rIns="0" bIns="0" rtlCol="0" anchor="ctr"/>
+          <a:lstStyle/>
+          <a:p>
             <a:pPr indent="0" marL="0">
-              <a:lnSpc>
-                <a:spcPct val="110000"/>
-              </a:lnSpc>
               <a:buNone/>
             </a:pPr>
             <a:r>
@@ -5088,9 +5104,6 @@
               <a:t>前年比 </a:t>
             </a:r>
             <a:pPr indent="0" marL="0">
-              <a:lnSpc>
-                <a:spcPct val="110000"/>
-              </a:lnSpc>
               <a:buNone/>
             </a:pPr>
             <a:r>
@@ -5102,7 +5115,7 @@
                 <a:ea typeface="Meiryo" pitchFamily="34" charset="-122"/>
                 <a:cs typeface="Meiryo" pitchFamily="34" charset="-120"/>
               </a:rPr>
-              <a:t>+5件 (+55.6%)</a:t>
+              <a:t>-1件 (-12.5%)</a:t>
             </a:r>
             <a:endParaRPr lang="en-US" sz="1100" dirty="0"/>
           </a:p>
@@ -5371,7 +5384,7 @@
                 <a:ea typeface="Meiryo" pitchFamily="34" charset="-122"/>
                 <a:cs typeface="Meiryo" pitchFamily="34" charset="-120"/>
               </a:rPr>
-              <a:t>梅雨期の来店減を見込み、雨天日限定の「平日フィッティング半額」キャンペーンを6/8〜6/21で実施。フィッティング件数が前月比+3件（11→14件）。</a:t>
+              <a:t>6月は新規入会9名（会員名簿）・退会0名で純増、正会員210名。7〜8月に退会予定10名あり定着施策を前倒し。</a:t>
             </a:r>
             <a:endParaRPr lang="en-US" sz="1250" dirty="0"/>
           </a:p>
@@ -5491,7 +5504,7 @@
                 <a:ea typeface="Meiryo" pitchFamily="34" charset="-122"/>
                 <a:cs typeface="Meiryo" pitchFamily="34" charset="-120"/>
               </a:rPr>
-              <a:t>体験レッスンの導線を見直し、Smart Hello受付からの体験予約フォームを短縮化。6月体験予約は37件（全件新規）。</a:t>
+              <a:t>体験利用7件に対し当月入会9名で入会率128.6%（会員名簿入会÷体験。体験非経由の入会も含むため100%超）。フィッティング7件→クラブ購入6件と高転換。</a:t>
             </a:r>
             <a:endParaRPr lang="en-US" sz="1250" dirty="0"/>
           </a:p>
@@ -5611,7 +5624,7 @@
                 <a:ea typeface="Meiryo" pitchFamily="34" charset="-122"/>
                 <a:cs typeface="Meiryo" pitchFamily="34" charset="-120"/>
               </a:rPr>
-              <a:t>物販は父の日フェア（6/14〜6/15）でグローブ・ボール中心に販促。物販売上は前月比+17.8%（71.5万→84.2万円）。</a:t>
+              <a:t>パーソナルレッスン30件、打席A〜Eの5面稼働（練習タイム・スタッフアワー中心）。</a:t>
             </a:r>
             <a:endParaRPr lang="en-US" sz="1250" dirty="0"/>
           </a:p>
@@ -5731,7 +5744,7 @@
                 <a:ea typeface="Meiryo" pitchFamily="34" charset="-122"/>
                 <a:cs typeface="Meiryo" pitchFamily="34" charset="-120"/>
               </a:rPr>
-              <a:t>6月は新規入会9名・退会0名で純増（正会員210名）。ただし7〜8月に退会予定10名があり、定着施策を前倒しで準備。</a:t>
+              <a:t>物販は父の日フェア（6/14〜6/15）等で好調。物販売上は前月比+50.1%（78.2万→117.4万円・税込）。</a:t>
             </a:r>
             <a:endParaRPr lang="en-US" sz="1250" dirty="0"/>
           </a:p>
@@ -6019,7 +6032,7 @@
                 <a:ea typeface="Meiryo" pitchFamily="34" charset="-122"/>
                 <a:cs typeface="Meiryo" pitchFamily="34" charset="-120"/>
               </a:rPr>
-              <a:t>7〜8月に退会予定が10名。退会理由は「予約が取りづらい」が複数を占め、混雑時間帯の予約体験に課題。</a:t>
+              <a:t>体験件数が前月17→7件へ半減。梅雨・集客施策のタイミングに左右され、体験の母数確保が課題。</a:t>
             </a:r>
             <a:endParaRPr lang="en-US" sz="1100" dirty="0"/>
           </a:p>
@@ -6080,7 +6093,7 @@
                 <a:ea typeface="Meiryo" pitchFamily="34" charset="-122"/>
                 <a:cs typeface="Meiryo" pitchFamily="34" charset="-120"/>
               </a:rPr>
-              <a:t>【退会予定対策】退会予定10名へ担当コーチからの面談＋休会提案（退会回避）を7月上旬までに実施。特に「予約が取りづらい」層へ空き枠の可視化・予約導線を改善。</a:t>
+              <a:t>【体験集客】SNS・Googleマップ・紹介から体験予約を増やし、体験の母数を回復。チャネル別に予約→入会を追跡。</a:t>
             </a:r>
             <a:endParaRPr lang="en-US" sz="1100" dirty="0"/>
           </a:p>
@@ -6165,7 +6178,7 @@
                 <a:ea typeface="Meiryo" pitchFamily="34" charset="-122"/>
                 <a:cs typeface="Meiryo" pitchFamily="34" charset="-120"/>
               </a:rPr>
-              <a:t>フィッティングは伸びたが、フィッティング→クラブ購入（物販）への転換が弱く、単発で終わりやすい。</a:t>
+              <a:t>7〜8月に退会予定10名。退会理由に「予約が取りづらい」が複数。混雑時間帯の打席・予約導線が課題。</a:t>
             </a:r>
             <a:endParaRPr lang="en-US" sz="1100" dirty="0"/>
           </a:p>
@@ -6226,7 +6239,7 @@
                 <a:ea typeface="Meiryo" pitchFamily="34" charset="-122"/>
                 <a:cs typeface="Meiryo" pitchFamily="34" charset="-120"/>
               </a:rPr>
-              <a:t>【物販転換】フィッティング実施者へ後日クラブ提案を行う「試打→見積→購入」フローを整備。フィッティング時に見積書を即時発行できる運用を7月中に開始。</a:t>
+              <a:t>【退会予定対策】退会予定10名へ面談＋休会提案を7月上旬までに実施。空き枠可視化・時間帯分散で予約の取りやすさを改善。</a:t>
             </a:r>
             <a:endParaRPr lang="en-US" sz="1100" dirty="0"/>
           </a:p>
@@ -6311,7 +6324,7 @@
                 <a:ea typeface="Meiryo" pitchFamily="34" charset="-122"/>
                 <a:cs typeface="Meiryo" pitchFamily="34" charset="-120"/>
               </a:rPr>
-              <a:t>体験予約は37件と多いが、入会への転換にばらつき。担当・曜日による差が見える。</a:t>
+              <a:t>フィッティング件数も前月13→7件へ減少。購入転換（6/7）は高いだけに、送客数の底上げが必要。</a:t>
             </a:r>
             <a:endParaRPr lang="en-US" sz="1100" dirty="0"/>
           </a:p>
@@ -6372,7 +6385,7 @@
                 <a:ea typeface="Meiryo" pitchFamily="34" charset="-122"/>
                 <a:cs typeface="Meiryo" pitchFamily="34" charset="-120"/>
               </a:rPr>
-              <a:t>【入会率改善】体験→入会の突合データから、転換率の高い担当・曜日・プログラムを特定し、体験枠の配置を最適化する。</a:t>
+              <a:t>【フィッティング送客】購入転換が高いフィッティングへ、体験・会員から送客を強化し件数の底上げを図る。</a:t>
             </a:r>
             <a:endParaRPr lang="en-US" sz="1100" dirty="0"/>
           </a:p>
@@ -6604,7 +6617,7 @@
                 <a:ea typeface="Meiryo" pitchFamily="34" charset="-122"/>
                 <a:cs typeface="Meiryo" pitchFamily="34" charset="-120"/>
               </a:rPr>
-              <a:t>会員数は会員名簿の会員種類名に準拠。正会員は「スタッフ・モニター会員・法人会員2枚目・トライアル会員」を除外して集計（当月末退会者は当月から除外）。</a:t>
+              <a:t>入会率＝会員名簿の当月入会数 ÷ 一時利用の体験者数（会員名簿基準）。当月9÷7=128.6%。会員名簿の入会には体験を経ない直接入会も含むため100%を超えることがある。</a:t>
             </a:r>
             <a:endParaRPr lang="en-US" sz="1250" dirty="0"/>
           </a:p>
@@ -6663,7 +6676,7 @@
                 <a:ea typeface="Meiryo" pitchFamily="34" charset="-122"/>
                 <a:cs typeface="Meiryo" pitchFamily="34" charset="-120"/>
               </a:rPr>
-              <a:t>7/1より夏季営業時間（平日〜23時）に変更。スタッフシフトはShift Cloudで調整済み。</a:t>
+              <a:t>体験・フィッティングは一時利用者名簿、物販売上は売上データ（税込）、会員数は会員名簿を正として集計。予約一覧はキャンセル未反映のため打席稼働・パーソナル監視に使用。</a:t>
             </a:r>
             <a:endParaRPr lang="en-US" sz="1250" dirty="0"/>
           </a:p>
@@ -6722,7 +6735,7 @@
                 <a:ea typeface="Meiryo" pitchFamily="34" charset="-122"/>
                 <a:cs typeface="Meiryo" pitchFamily="34" charset="-120"/>
               </a:rPr>
-              <a:t>会員名簿・売上・勤怠はYOZAN GENESISに接続済み。物販売上・フィッティング件数の自動記録は次フェーズで対応予定。</a:t>
+              <a:t>6月実績: パーソナル30件・打席5面稼働・ビジター打席2件。会員数は会員種類名でスタッフ・モニター会員・法人会員2枚目・トライアル会員を除外。</a:t>
             </a:r>
             <a:endParaRPr lang="en-US" sz="1250" dirty="0"/>
           </a:p>
@@ -7745,7 +7758,7 @@
                           <a:ea typeface="Meiryo" pitchFamily="34" charset="-122"/>
                           <a:cs typeface="Meiryo" pitchFamily="34" charset="-120"/>
                         </a:rPr>
-                        <a:t>体験予約数</a:t>
+                        <a:t>体験（一時利用）</a:t>
                       </a:r>
                       <a:endParaRPr lang="en-US" sz="1050" dirty="0">
                         <a:latin typeface="Meiryo" charset="0"/>
@@ -7813,7 +7826,7 @@
                           <a:ea typeface="Meiryo" pitchFamily="34" charset="-122"/>
                           <a:cs typeface="Meiryo" pitchFamily="34" charset="-120"/>
                         </a:rPr>
-                        <a:t>37件</a:t>
+                        <a:t>7件</a:t>
                       </a:r>
                       <a:endParaRPr lang="en-US" sz="1050" dirty="0">
                         <a:latin typeface="Meiryo" charset="0"/>
@@ -7881,7 +7894,7 @@
                           <a:ea typeface="Meiryo" pitchFamily="34" charset="-122"/>
                           <a:cs typeface="Meiryo" pitchFamily="34" charset="-120"/>
                         </a:rPr>
-                        <a:t>31件</a:t>
+                        <a:t>17件</a:t>
                       </a:r>
                       <a:endParaRPr lang="en-US" sz="1050" dirty="0">
                         <a:latin typeface="Meiryo" charset="0"/>
@@ -7943,13 +7956,13 @@
                       <a:r>
                         <a:rPr lang="en-US" sz="1050" dirty="0">
                           <a:solidFill>
-                            <a:srgbClr val="1E6B3A"/>
+                            <a:srgbClr val="C0392B"/>
                           </a:solidFill>
                           <a:latin typeface="Meiryo" pitchFamily="34" charset="0"/>
                           <a:ea typeface="Meiryo" pitchFamily="34" charset="-122"/>
                           <a:cs typeface="Meiryo" pitchFamily="34" charset="-120"/>
                         </a:rPr>
-                        <a:t>+6件 (+19.4%)</a:t>
+                        <a:t>-10件 (-58.8%)</a:t>
                       </a:r>
                       <a:endParaRPr lang="en-US" sz="1050" dirty="0">
                         <a:latin typeface="Meiryo" charset="0"/>
@@ -8017,7 +8030,7 @@
                           <a:ea typeface="Meiryo" pitchFamily="34" charset="-122"/>
                           <a:cs typeface="Meiryo" pitchFamily="34" charset="-120"/>
                         </a:rPr>
-                        <a:t>24件</a:t>
+                        <a:t>7件</a:t>
                       </a:r>
                       <a:endParaRPr lang="en-US" sz="1050" dirty="0">
                         <a:latin typeface="Meiryo" charset="0"/>
@@ -8079,13 +8092,13 @@
                       <a:r>
                         <a:rPr lang="en-US" sz="1050" dirty="0">
                           <a:solidFill>
-                            <a:srgbClr val="1E6B3A"/>
+                            <a:srgbClr val="6B7B70"/>
                           </a:solidFill>
                           <a:latin typeface="Meiryo" pitchFamily="34" charset="0"/>
                           <a:ea typeface="Meiryo" pitchFamily="34" charset="-122"/>
                           <a:cs typeface="Meiryo" pitchFamily="34" charset="-120"/>
                         </a:rPr>
-                        <a:t>+13件 (+54.2%)</a:t>
+                        <a:t>±0件 (0%)</a:t>
                       </a:r>
                       <a:endParaRPr lang="en-US" sz="1050" dirty="0">
                         <a:latin typeface="Meiryo" charset="0"/>
@@ -8155,7 +8168,7 @@
                           <a:ea typeface="Meiryo" pitchFamily="34" charset="-122"/>
                           <a:cs typeface="Meiryo" pitchFamily="34" charset="-120"/>
                         </a:rPr>
-                        <a:t>入会率</a:t>
+                        <a:t>入会率(入会/体験)</a:t>
                       </a:r>
                       <a:endParaRPr lang="en-US" sz="1050" dirty="0">
                         <a:latin typeface="Meiryo" charset="0"/>
@@ -8223,7 +8236,7 @@
                           <a:ea typeface="Meiryo" pitchFamily="34" charset="-122"/>
                           <a:cs typeface="Meiryo" pitchFamily="34" charset="-120"/>
                         </a:rPr>
-                        <a:t>62.5%</a:t>
+                        <a:t>128.6%</a:t>
                       </a:r>
                       <a:endParaRPr lang="en-US" sz="1050" dirty="0">
                         <a:latin typeface="Meiryo" charset="0"/>
@@ -8291,7 +8304,7 @@
                           <a:ea typeface="Meiryo" pitchFamily="34" charset="-122"/>
                           <a:cs typeface="Meiryo" pitchFamily="34" charset="-120"/>
                         </a:rPr>
-                        <a:t>55%</a:t>
+                        <a:t>52.9%</a:t>
                       </a:r>
                       <a:endParaRPr lang="en-US" sz="1050" dirty="0">
                         <a:latin typeface="Meiryo" charset="0"/>
@@ -8359,7 +8372,7 @@
                           <a:ea typeface="Meiryo" pitchFamily="34" charset="-122"/>
                           <a:cs typeface="Meiryo" pitchFamily="34" charset="-120"/>
                         </a:rPr>
-                        <a:t>+7.5pt (+13.6%)</a:t>
+                        <a:t>+75.7pt (+143.1%)</a:t>
                       </a:r>
                       <a:endParaRPr lang="en-US" sz="1050" dirty="0">
                         <a:latin typeface="Meiryo" charset="0"/>
@@ -8427,7 +8440,7 @@
                           <a:ea typeface="Meiryo" pitchFamily="34" charset="-122"/>
                           <a:cs typeface="Meiryo" pitchFamily="34" charset="-120"/>
                         </a:rPr>
-                        <a:t>48%</a:t>
+                        <a:t>71.4%</a:t>
                       </a:r>
                       <a:endParaRPr lang="en-US" sz="1050" dirty="0">
                         <a:latin typeface="Meiryo" charset="0"/>
@@ -8495,7 +8508,7 @@
                           <a:ea typeface="Meiryo" pitchFamily="34" charset="-122"/>
                           <a:cs typeface="Meiryo" pitchFamily="34" charset="-120"/>
                         </a:rPr>
-                        <a:t>+14.5pt (+30.2%)</a:t>
+                        <a:t>+57.2pt (+80.1%)</a:t>
                       </a:r>
                       <a:endParaRPr lang="en-US" sz="1050" dirty="0">
                         <a:latin typeface="Meiryo" charset="0"/>
@@ -9043,7 +9056,7 @@
                           <a:ea typeface="Meiryo" pitchFamily="34" charset="-122"/>
                           <a:cs typeface="Meiryo" pitchFamily="34" charset="-120"/>
                         </a:rPr>
-                        <a:t>¥842,000</a:t>
+                        <a:t>¥1,174,200</a:t>
                       </a:r>
                       <a:endParaRPr lang="en-US" sz="1050" dirty="0">
                         <a:latin typeface="Meiryo" charset="0"/>
@@ -9111,7 +9124,7 @@
                           <a:ea typeface="Meiryo" pitchFamily="34" charset="-122"/>
                           <a:cs typeface="Meiryo" pitchFamily="34" charset="-120"/>
                         </a:rPr>
-                        <a:t>¥715,000</a:t>
+                        <a:t>¥782,311</a:t>
                       </a:r>
                       <a:endParaRPr lang="en-US" sz="1050" dirty="0">
                         <a:latin typeface="Meiryo" charset="0"/>
@@ -9179,7 +9192,7 @@
                           <a:ea typeface="Meiryo" pitchFamily="34" charset="-122"/>
                           <a:cs typeface="Meiryo" pitchFamily="34" charset="-120"/>
                         </a:rPr>
-                        <a:t>+127,000円 (+17.8%)</a:t>
+                        <a:t>+391,889円 (+50.1%)</a:t>
                       </a:r>
                       <a:endParaRPr lang="en-US" sz="1050" dirty="0">
                         <a:latin typeface="Meiryo" charset="0"/>
@@ -9247,7 +9260,7 @@
                           <a:ea typeface="Meiryo" pitchFamily="34" charset="-122"/>
                           <a:cs typeface="Meiryo" pitchFamily="34" charset="-120"/>
                         </a:rPr>
-                        <a:t>¥690,000</a:t>
+                        <a:t>¥1,392,601</a:t>
                       </a:r>
                       <a:endParaRPr lang="en-US" sz="1050" dirty="0">
                         <a:latin typeface="Meiryo" charset="0"/>
@@ -9309,13 +9322,13 @@
                       <a:r>
                         <a:rPr lang="en-US" sz="1050" dirty="0">
                           <a:solidFill>
-                            <a:srgbClr val="1E6B3A"/>
+                            <a:srgbClr val="C0392B"/>
                           </a:solidFill>
                           <a:latin typeface="Meiryo" pitchFamily="34" charset="0"/>
                           <a:ea typeface="Meiryo" pitchFamily="34" charset="-122"/>
                           <a:cs typeface="Meiryo" pitchFamily="34" charset="-120"/>
                         </a:rPr>
-                        <a:t>+152,000円 (+22%)</a:t>
+                        <a:t>-218,401円 (-15.7%)</a:t>
                       </a:r>
                       <a:endParaRPr lang="en-US" sz="1050" dirty="0">
                         <a:latin typeface="Meiryo" charset="0"/>
@@ -9453,7 +9466,7 @@
                           <a:ea typeface="Meiryo" pitchFamily="34" charset="-122"/>
                           <a:cs typeface="Meiryo" pitchFamily="34" charset="-120"/>
                         </a:rPr>
-                        <a:t>14件</a:t>
+                        <a:t>7件</a:t>
                       </a:r>
                       <a:endParaRPr lang="en-US" sz="1050" dirty="0">
                         <a:latin typeface="Meiryo" charset="0"/>
@@ -9521,7 +9534,7 @@
                           <a:ea typeface="Meiryo" pitchFamily="34" charset="-122"/>
                           <a:cs typeface="Meiryo" pitchFamily="34" charset="-120"/>
                         </a:rPr>
-                        <a:t>11件</a:t>
+                        <a:t>13件</a:t>
                       </a:r>
                       <a:endParaRPr lang="en-US" sz="1050" dirty="0">
                         <a:latin typeface="Meiryo" charset="0"/>
@@ -9583,13 +9596,13 @@
                       <a:r>
                         <a:rPr lang="en-US" sz="1050" dirty="0">
                           <a:solidFill>
-                            <a:srgbClr val="1E6B3A"/>
+                            <a:srgbClr val="C0392B"/>
                           </a:solidFill>
                           <a:latin typeface="Meiryo" pitchFamily="34" charset="0"/>
                           <a:ea typeface="Meiryo" pitchFamily="34" charset="-122"/>
                           <a:cs typeface="Meiryo" pitchFamily="34" charset="-120"/>
                         </a:rPr>
-                        <a:t>+3件 (+27.3%)</a:t>
+                        <a:t>-6件 (-46.2%)</a:t>
                       </a:r>
                       <a:endParaRPr lang="en-US" sz="1050" dirty="0">
                         <a:latin typeface="Meiryo" charset="0"/>
@@ -9657,7 +9670,7 @@
                           <a:ea typeface="Meiryo" pitchFamily="34" charset="-122"/>
                           <a:cs typeface="Meiryo" pitchFamily="34" charset="-120"/>
                         </a:rPr>
-                        <a:t>9件</a:t>
+                        <a:t>8件</a:t>
                       </a:r>
                       <a:endParaRPr lang="en-US" sz="1050" dirty="0">
                         <a:latin typeface="Meiryo" charset="0"/>
@@ -9719,13 +9732,13 @@
                       <a:r>
                         <a:rPr lang="en-US" sz="1050" dirty="0">
                           <a:solidFill>
-                            <a:srgbClr val="1E6B3A"/>
+                            <a:srgbClr val="C0392B"/>
                           </a:solidFill>
                           <a:latin typeface="Meiryo" pitchFamily="34" charset="0"/>
                           <a:ea typeface="Meiryo" pitchFamily="34" charset="-122"/>
                           <a:cs typeface="Meiryo" pitchFamily="34" charset="-120"/>
                         </a:rPr>
-                        <a:t>+5件 (+55.6%)</a:t>
+                        <a:t>-1件 (-12.5%)</a:t>
                       </a:r>
                       <a:endParaRPr lang="en-US" sz="1050" dirty="0">
                         <a:latin typeface="Meiryo" charset="0"/>
@@ -11044,7 +11057,7 @@
                 <a:ea typeface="Meiryo" pitchFamily="34" charset="-122"/>
                 <a:cs typeface="Meiryo" pitchFamily="34" charset="-120"/>
               </a:rPr>
-              <a:t>※ 会員数・正会員内訳・除外区分・6月入会/退会は 会員名簿(2026-07-07取得)の実データ。会員推移は現名簿の入会日からの再構成のため過去の退会者を含まず参考値（前年比は算出保留）。物販売上・フィッティング・体験予約・入会率は専用データ未接続のため代表値。</a:t>
+              <a:t>※ 会員数・入会数・除外区分は会員名簿(2026-07-07)、体験・フィッティングは一時利用者名簿(2026-06)、物販売上は売上データ(品目「販売」税込)の実データ。入会率＝会員名簿の当月入会数÷一時利用の体験者数（当月9÷7=128.6%、体験非経由の入会も含むため100%超）。予約一覧はキャンセル未反映のため打席稼働・パーソナル監視に使用。会員推移は名簿の入会日再構成の参考値。</a:t>
             </a:r>
             <a:endParaRPr lang="en-US" sz="800" dirty="0"/>
           </a:p>
